--- a/templates/triple.pptx
+++ b/templates/triple.pptx
@@ -346,7 +346,7 @@
             <a:fld id="{1D8BD707-D9CF-40AE-B4C6-C98DA3205C09}" type="datetimeFigureOut">
               <a:rPr lang="en-US" smtClean="0"/>
               <a:pPr/>
-              <a:t>6/23/2026</a:t>
+              <a:t>6/26/2026</a:t>
             </a:fld>
             <a:endParaRPr lang="en-US"/>
           </a:p>
@@ -511,7 +511,7 @@
             <a:fld id="{1D8BD707-D9CF-40AE-B4C6-C98DA3205C09}" type="datetimeFigureOut">
               <a:rPr lang="en-US" smtClean="0"/>
               <a:pPr/>
-              <a:t>6/23/2026</a:t>
+              <a:t>6/26/2026</a:t>
             </a:fld>
             <a:endParaRPr lang="en-US"/>
           </a:p>
@@ -686,7 +686,7 @@
             <a:fld id="{1D8BD707-D9CF-40AE-B4C6-C98DA3205C09}" type="datetimeFigureOut">
               <a:rPr lang="en-US" smtClean="0"/>
               <a:pPr/>
-              <a:t>6/23/2026</a:t>
+              <a:t>6/26/2026</a:t>
             </a:fld>
             <a:endParaRPr lang="en-US"/>
           </a:p>
@@ -851,7 +851,7 @@
             <a:fld id="{1D8BD707-D9CF-40AE-B4C6-C98DA3205C09}" type="datetimeFigureOut">
               <a:rPr lang="en-US" smtClean="0"/>
               <a:pPr/>
-              <a:t>6/23/2026</a:t>
+              <a:t>6/26/2026</a:t>
             </a:fld>
             <a:endParaRPr lang="en-US"/>
           </a:p>
@@ -1093,7 +1093,7 @@
             <a:fld id="{1D8BD707-D9CF-40AE-B4C6-C98DA3205C09}" type="datetimeFigureOut">
               <a:rPr lang="en-US" smtClean="0"/>
               <a:pPr/>
-              <a:t>6/23/2026</a:t>
+              <a:t>6/26/2026</a:t>
             </a:fld>
             <a:endParaRPr lang="en-US"/>
           </a:p>
@@ -1375,7 +1375,7 @@
             <a:fld id="{1D8BD707-D9CF-40AE-B4C6-C98DA3205C09}" type="datetimeFigureOut">
               <a:rPr lang="en-US" smtClean="0"/>
               <a:pPr/>
-              <a:t>6/23/2026</a:t>
+              <a:t>6/26/2026</a:t>
             </a:fld>
             <a:endParaRPr lang="en-US"/>
           </a:p>
@@ -1791,7 +1791,7 @@
             <a:fld id="{1D8BD707-D9CF-40AE-B4C6-C98DA3205C09}" type="datetimeFigureOut">
               <a:rPr lang="en-US" smtClean="0"/>
               <a:pPr/>
-              <a:t>6/23/2026</a:t>
+              <a:t>6/26/2026</a:t>
             </a:fld>
             <a:endParaRPr lang="en-US"/>
           </a:p>
@@ -1905,7 +1905,7 @@
             <a:fld id="{1D8BD707-D9CF-40AE-B4C6-C98DA3205C09}" type="datetimeFigureOut">
               <a:rPr lang="en-US" smtClean="0"/>
               <a:pPr/>
-              <a:t>6/23/2026</a:t>
+              <a:t>6/26/2026</a:t>
             </a:fld>
             <a:endParaRPr lang="en-US"/>
           </a:p>
@@ -1997,7 +1997,7 @@
             <a:fld id="{1D8BD707-D9CF-40AE-B4C6-C98DA3205C09}" type="datetimeFigureOut">
               <a:rPr lang="en-US" smtClean="0"/>
               <a:pPr/>
-              <a:t>6/23/2026</a:t>
+              <a:t>6/26/2026</a:t>
             </a:fld>
             <a:endParaRPr lang="en-US"/>
           </a:p>
@@ -2269,7 +2269,7 @@
             <a:fld id="{1D8BD707-D9CF-40AE-B4C6-C98DA3205C09}" type="datetimeFigureOut">
               <a:rPr lang="en-US" smtClean="0"/>
               <a:pPr/>
-              <a:t>6/23/2026</a:t>
+              <a:t>6/26/2026</a:t>
             </a:fld>
             <a:endParaRPr lang="en-US"/>
           </a:p>
@@ -2518,7 +2518,7 @@
             <a:fld id="{1D8BD707-D9CF-40AE-B4C6-C98DA3205C09}" type="datetimeFigureOut">
               <a:rPr lang="en-US" smtClean="0"/>
               <a:pPr/>
-              <a:t>6/23/2026</a:t>
+              <a:t>6/26/2026</a:t>
             </a:fld>
             <a:endParaRPr lang="en-US"/>
           </a:p>
@@ -2726,7 +2726,7 @@
             <a:fld id="{1D8BD707-D9CF-40AE-B4C6-C98DA3205C09}" type="datetimeFigureOut">
               <a:rPr lang="en-US" smtClean="0"/>
               <a:pPr/>
-              <a:t>6/23/2026</a:t>
+              <a:t>6/26/2026</a:t>
             </a:fld>
             <a:endParaRPr lang="en-US"/>
           </a:p>
@@ -3345,8 +3345,8 @@
         </p:nvSpPr>
         <p:spPr>
           <a:xfrm>
-            <a:off x="2897064" y="5525788"/>
-            <a:ext cx="4327644" cy="573746"/>
+            <a:off x="2895600" y="5523074"/>
+            <a:ext cx="4327644" cy="534826"/>
           </a:xfrm>
           <a:prstGeom prst="rect">
             <a:avLst/>
@@ -3364,7 +3364,7 @@
               </a:lnSpc>
             </a:pPr>
             <a:r>
-              <a:rPr lang="en-US" sz="3330" b="1" dirty="0">
+              <a:rPr lang="en-US" sz="2500" b="1" dirty="0">
                 <a:solidFill>
                   <a:srgbClr val="000000"/>
                 </a:solidFill>
@@ -10203,7 +10203,7 @@
         <p:spPr>
           <a:xfrm>
             <a:off x="5578684" y="2993443"/>
-            <a:ext cx="4284626" cy="548130"/>
+            <a:ext cx="4284626" cy="505972"/>
           </a:xfrm>
           <a:prstGeom prst="rect">
             <a:avLst/>
@@ -10221,7 +10221,7 @@
               </a:lnSpc>
             </a:pPr>
             <a:r>
-              <a:rPr lang="en-US" sz="3170" b="1" dirty="0">
+              <a:rPr lang="en-US" sz="2500" b="1" dirty="0">
                 <a:solidFill>
                   <a:srgbClr val="FFFFFF"/>
                 </a:solidFill>
@@ -10514,7 +10514,7 @@
                 <a:cs typeface="Open Sans Bold Italics"/>
                 <a:sym typeface="Open Sans Bold Italics"/>
               </a:rPr>
-              <a:t>: 60 meses.</a:t>
+              <a:t>: [PRAZO]</a:t>
             </a:r>
           </a:p>
           <a:p>
